--- a/public/showroom/showroom-layout.pptx
+++ b/public/showroom/showroom-layout.pptx
@@ -16901,7 +16901,7 @@
                 <a:ea typeface="Arial Unicode MS" pitchFamily="34" charset="-128"/>
                 <a:cs typeface="Arial Unicode MS" pitchFamily="34" charset="-128"/>
               </a:rPr>
-              <a:t>Data Plane:</a:t>
+              <a:t>Work Plane:</a:t>
             </a:r>
             <a:br>
               <a:rPr kumimoji="0" lang="en-US" sz="1100" b="0" i="0" u="none" strike="noStrike" kern="0" cap="none" spc="0" normalizeH="0" baseline="0" noProof="0" dirty="0">
@@ -35731,69 +35731,10 @@
 </file>
 
 <file path=customXml/item2.xml><?xml version="1.0" encoding="utf-8"?>
-<?mso-contentType ?>
-<spe:Receivers xmlns:spe="http://schemas.microsoft.com/sharepoint/events">
-  <Receiver>
-    <Name>Document ID Generator</Name>
-    <Synchronization>Synchronous</Synchronization>
-    <Type>10001</Type>
-    <SequenceNumber>1000</SequenceNumber>
-    <Url/>
-    <Assembly>Microsoft.Office.DocumentManagement, Version=16.0.0.0, Culture=neutral, PublicKeyToken=71e9bce111e9429c</Assembly>
-    <Class>Microsoft.Office.DocumentManagement.Internal.DocIdHandler</Class>
-    <Data/>
-    <Filter/>
-  </Receiver>
-  <Receiver>
-    <Name>Document ID Generator</Name>
-    <Synchronization>Synchronous</Synchronization>
-    <Type>10002</Type>
-    <SequenceNumber>1001</SequenceNumber>
-    <Url/>
-    <Assembly>Microsoft.Office.DocumentManagement, Version=16.0.0.0, Culture=neutral, PublicKeyToken=71e9bce111e9429c</Assembly>
-    <Class>Microsoft.Office.DocumentManagement.Internal.DocIdHandler</Class>
-    <Data/>
-    <Filter/>
-  </Receiver>
-  <Receiver>
-    <Name>Document ID Generator</Name>
-    <Synchronization>Synchronous</Synchronization>
-    <Type>10004</Type>
-    <SequenceNumber>1002</SequenceNumber>
-    <Url/>
-    <Assembly>Microsoft.Office.DocumentManagement, Version=16.0.0.0, Culture=neutral, PublicKeyToken=71e9bce111e9429c</Assembly>
-    <Class>Microsoft.Office.DocumentManagement.Internal.DocIdHandler</Class>
-    <Data/>
-    <Filter/>
-  </Receiver>
-  <Receiver>
-    <Name>Document ID Generator</Name>
-    <Synchronization>Synchronous</Synchronization>
-    <Type>10006</Type>
-    <SequenceNumber>1003</SequenceNumber>
-    <Url/>
-    <Assembly>Microsoft.Office.DocumentManagement, Version=16.0.0.0, Culture=neutral, PublicKeyToken=71e9bce111e9429c</Assembly>
-    <Class>Microsoft.Office.DocumentManagement.Internal.DocIdHandler</Class>
-    <Data/>
-    <Filter/>
-  </Receiver>
-</spe:Receivers>
+<TemplafyTemplateConfiguration><![CDATA[{"elementsMetadata":[{"type":"shape","id":"d2a5e899-6291-46a7-a989-53cff643de6a","elementConfiguration":{"binding":"{{ DataSources.Classification[Form.Classification.Name].Display}}","type":"text","disableUpdates":false}},{"type":"shape","id":"39417289-d54b-4324-8a8a-2e1f43e092e3","elementConfiguration":{"inheritDimensions":"{{InheritDimensions.InheritNone}}","width":"","height":"1 cm","image":"{{Form.SAPLogo.SubbrandBlue}}","visibility":"","type":"image","disableUpdates":false}},{"type":"shape","id":"1fc1821b-f216-46de-b54d-b736cfccb8cd","elementConfiguration":{"binding":"{{Form.Classification.Display}}","visibility":"","type":"text","disableUpdates":false}},{"type":"shape","id":"be5cec05-5e5b-420e-8e22-74ec879a96f4","elementConfiguration":{"binding":"{{Form.Classification.Display}}","visibility":"","type":"text","disableUpdates":false}},{"type":"shape","id":"b0049908-f0b7-4f69-9e2c-153e0152b501","elementConfiguration":{"inheritDimensions":"{{InheritDimensions.InheritNone}}","width":"","height":"1 cm","image":"{{Form.SAPLogo.SubbrandBlack}}","visibility":"","type":"image","disableUpdates":false}},{"type":"shape","id":"eac1b77e-f4cd-4c4b-a931-e03bac202f34","elementConfiguration":{"inheritDimensions":"{{InheritDimensions.InheritNone}}","width":"","height":"1 cm","image":"{{Form.SAPLogo.SubbrandWhite}}","visibility":"","type":"image","disableUpdates":false}},{"type":"shape","id":"7b47a565-415b-49e0-b138-ab108c2c5bf9","elementConfiguration":{"binding":"{{Form.Classification.Display}}","visibility":"","type":"text","disableUpdates":false}},{"type":"shape","id":"af622395-3cc3-4f57-bfc8-0cade9aeb343","elementConfiguration":{"inheritDimensions":"{{InheritDimensions.InheritNone}}","width":"","height":"1 cm","image":"{{Form.SAPLogo.SubbrandBlue}}","visibility":"","type":"image","disableUpdates":false}},{"type":"shape","id":"7ce31f04-ac1b-43fd-b1bd-03e4f0afe96f","elementConfiguration":{"binding":"{{Form.Classification.Display}}","visibility":"","type":"text","disableUpdates":false}},{"type":"shape","id":"7086da9f-9e03-4afa-ae88-da1106d959de","elementConfiguration":{"inheritDimensions":"{{InheritDimensions.InheritNone}}","width":"","height":"1 cm","image":"{{Form.SAPLogo.SubbrandBlue}}","visibility":"","type":"image","disableUpdates":false}},{"type":"shape","id":"e386a4ac-3173-45e4-9ccc-c2edc57366b1","elementConfiguration":{"binding":"{{Form.Classification.Display}}","visibility":"","type":"text","disableUpdates":false}},{"type":"shape","id":"e05bf989-c620-408c-982d-87c8f6cb3c3b","elementConfiguration":{"inheritDimensions":"{{InheritDimensions.InheritNone}}","width":"","height":"1 cm","image":"{{Form.SAPLogo.SubbrandBlue}}","visibility":"","type":"image","disableUpdates":false}},{"type":"shape","id":"1a0e37ad-b3f5-4493-8bd9-55d0a6497843","elementConfiguration":{"binding":"{{Form.Classification.Display}}","visibility":"","type":"text","disableUpdates":false}},{"type":"shape","id":"e2a3e93d-bd0a-49fa-91c9-a5cc9128d719","elementConfiguration":{"inheritDimensions":"{{InheritDimensions.InheritNone}}","width":"","height":"1 cm","image":"{{Form.SAPLogo.SubbrandWhite}}","visibility":"","type":"image","disableUpdates":false}},{"type":"shape","id":"aa193904-7b1a-41c2-8d48-f016243962b9","elementConfiguration":{"binding":"{{Form.Classification.Display}}","visibility":"","type":"text","disableUpdates":false}},{"type":"shape","id":"250ae429-51a3-4f7b-bb63-8b7d9d4a344f","elementConfiguration":{"binding":"{{DataSources.PPTCopyRight[\"Slide 5 copyright\"].CopyrightMessage}}","visibility":"","type":"text","disableUpdates":false}},{"type":"shape","id":"16bc9ca9-9858-45a5-b567-5d40c89c52d7","elementConfiguration":{"inheritDimensions":"{{InheritDimensions.InheritNone}}","width":"","height":"1 cm","image":"{{Form.SAPLogo.SubbrandBlack}}","visibility":"","type":"image","disableUpdates":false}},{"type":"shape","id":"839b1117-d1c2-46d5-bf6f-0be4823fe17a","elementConfiguration":{"binding":"{{Form.Classification.Display}}","visibility":"","type":"text","disableUpdates":false}},{"type":"shape","id":"95f178e8-912d-43f8-a78d-be2a42579b51","elementConfiguration":{"inheritDimensions":"{{InheritDimensions.InheritNone}}","width":"","height":"1 cm","image":"{{Form.SAPLogo.SubbrandWhite}}","visibility":"","type":"image","disableUpdates":false}},{"type":"shape","id":"522445cc-640a-48ad-baff-184cd00aa3b7","elementConfiguration":{"binding":"{{Form.Classification.Display}}","visibility":"","type":"text","disableUpdates":false}},{"type":"shape","id":"37744108-5a57-4878-9330-85a73170a356","elementConfiguration":{"inheritDimensions":"{{InheritDimensions.InheritNone}}","width":"","height":"1 cm","image":"{{Form.SAPLogo.SubbrandBlack}}","visibility":"","type":"image","disableUpdates":false}},{"type":"shape","id":"259d9c35-7d20-4427-8a64-40a93b11c506","elementConfiguration":{"binding":"{{Form.Classification.Display}}","visibility":"","type":"text","disableUpdates":false}},{"type":"shape","id":"ae0bf8b3-b385-430f-b3eb-acb65628601f","elementConfiguration":{"inheritDimensions":"{{InheritDimensions.InheritNone}}","width":"","height":"1 cm","image":"{{Form.SAPLogo.SubbrandWhite}}","visibility":"","type":"image","disableUpdates":false}},{"type":"shape","id":"cc483056-5139-4a2a-bf58-ab77694c4dca","elementConfiguration":{"binding":"{{Form.Classification.Display}}","visibility":"","type":"text","disableUpdates":false}},{"type":"shape","id":"3df636fb-c7f0-4fd8-9d7d-237adf67a874","elementConfiguration":{"inheritDimensions":"{{InheritDimensions.InheritNone}}","width":"","height":"1 cm","image":"{{Form.SAPLogo.SubbrandWhite}}","visibility":"","type":"image","disableUpdates":false}},{"type":"shape","id":"783f021e-1741-48c6-9e81-865609c9c0a6","elementConfiguration":{"binding":"{{Form.Classification.Display}}","visibility":"","type":"text","disableUpdates":false}},{"type":"shape","id":"314cc4ef-5fc2-470a-804f-636afe5d3346","elementConfiguration":{"binding":"{{StringJoin(\", \", Form.SpeakerName,\"SAP\")}}","type":"text","disableUpdates":false}},{"type":"shape","id":"5a197faf-3070-46ab-b3fb-027c40cfda26","elementConfiguration":{"binding":"{{FormatDateTime(Form.Date,\"MMMM dd, yyyy\",\"en-US\")}}","type":"text","disableUpdates":false}},{"type":"shape","id":"08835032-f3a0-4771-89d8-73177d312b78","elementConfiguration":{"binding":"{{StringJoin(\", \", Form.SpeakerName,\"SAP\")}}","type":"text","disableUpdates":false}},{"type":"shape","id":"4b6ce213-2ac3-49e2-8995-7692d4fd8fb8","elementConfiguration":{"binding":"{{FormatDateTime(Form.Date,\"MMMM dd, yyyy\",\"en-US\")}}","type":"text","disableUpdates":false}},{"type":"shape","id":"793a1971-5ade-4545-a721-da33ba80ad38","elementConfiguration":{"binding":"{{StringJoin(\", \", Form.SpeakerName,\"SAP\")}}","type":"text","disableUpdates":false}},{"type":"shape","id":"3e678ff5-a821-466f-b4b9-61545a83789a","elementConfiguration":{"binding":"{{FormatDateTime(Form.Date,\"MMMM dd, yyyy\",\"en-US\")}}","type":"text","disableUpdates":false}},{"type":"shape","id":"17e360d8-9841-438c-a1f0-789fee28b922","elementConfiguration":{"binding":"{{StringJoin(\", \", Form.SpeakerName,\"SAP\")}}","type":"text","disableUpdates":false}},{"type":"shape","id":"ed2ba5b2-cc69-4190-aee0-67711eb3c836","elementConfiguration":{"binding":"{{FormatDateTime(Form.Date,\"MMMM dd, yyyy\",\"en-US\")}}","type":"text","disableUpdates":false}},{"type":"shape","id":"8985aa0d-05e2-4122-870e-30d69dcbd753","elementConfiguration":{"binding":"{{StringJoin(\", \", Form.SpeakerName,\"SAP\")}}","type":"text","disableUpdates":false}},{"type":"shape","id":"c91ad873-91e9-4878-8cb6-cf5d0e938dee","elementConfiguration":{"binding":"{{FormatDateTime(Form.Date,\"MMMM dd, yyyy\",\"en-US\")}}","type":"text","disableUpdates":false}},{"type":"shape","id":"395826df-573b-481e-b770-0a38f8f2e18f","elementConfiguration":{"binding":"{{StringJoin(\", \", Form.SpeakerName,\"SAP\")}}","type":"text","disableUpdates":false}},{"type":"shape","id":"8d85e5ba-caf4-476b-93af-f8eec1d7b800","elementConfiguration":{"binding":"{{FormatDateTime(Form.Date,\"MMMM dd, yyyy\",\"en-US\")}}","type":"text","disableUpdates":false}},{"type":"shape","id":"7983c9cd-3ba9-46bd-b02b-84e9672cec2c","elementConfiguration":{"binding":"{{Form.SpeakerName}}","type":"text","disableUpdates":false}},{"type":"shape","id":"190287d2-6090-44f9-b8f3-7674b14f811d","elementConfiguration":{"binding":"{{Form.Email}}","type":"text","disableUpdates":false}}],"transformationConfigurations":[],"templateName":"SAP Template NEW","templateDescription":"Font issue resolved","enableDocumentContentUpdater":true,"version":"2.0"}]]></TemplafyTemplateConfiguration>
 </file>
 
 <file path=customXml/item3.xml><?xml version="1.0" encoding="utf-8"?>
-<TemplafyFormConfiguration><![CDATA[{"formFields":[{"distinct":false,"hideIfNoUserInteractionRequired":false,"required":true,"autoSelectFirstOption":false,"shareValue":false,"type":"dropDown","dataSourceName":"PPTSubBrandLogos2023","dataSourceFieldName":"Name","name":"SAPLogo","label":"Select Template"},{"distinct":false,"hideIfNoUserInteractionRequired":false,"required":true,"autoSelectFirstOption":false,"shareValue":false,"type":"dropDown","dataSourceName":"Classification","dataSourceFieldName":"Name","name":"Classification","label":"Select Classification"},{"required":false,"shareValue":false,"type":"datePicker","name":"Date","label":"Date"},{"required":false,"placeholder":"","lines":1,"defaultValue":"{{StringJoin(\" \", UserProfile.FirstName,UserProfile.LastName)}}","helpTexts":{"prefix":"After your name, include your preferred pronouns (they/them, she/her, he/him)."},"shareValue":false,"type":"textBox","name":"SpeakerName","label":"Name and Pronouns"},{"required":false,"placeholder":"","lines":1,"defaultValue":"{{UserProfile.Email}}","shareValue":false,"type":"textBox","name":"Email","label":"Email"}],"formDataEntries":[{"name":"SAPLogo","value":"pxB0tb4qiCEYCgGk2fAV86fXsKRk9ZMKiRC3VaLJ5C8="},{"name":"Classification","value":"JhIipzZMLzT12iPN9zD3fohu67W2dokK4YSrgIPhYes="},{"name":"SpeakerName","value":"n/aVkO+bL8Ky5r8yhtIP1kzUEzeDWyZhE8CcUDpY1XQ="}]}]]></TemplafyFormConfiguration>
-</file>
-
-<file path=customXml/item4.xml><?xml version="1.0" encoding="utf-8"?>
-<?mso-contentType ?>
-<FormTemplates xmlns="http://schemas.microsoft.com/sharepoint/v3/contenttype/forms">
-  <Display>DocumentLibraryForm</Display>
-  <Edit>DocumentLibraryForm</Edit>
-  <New>DocumentLibraryForm</New>
-</FormTemplates>
-</file>
-
-<file path=customXml/item5.xml><?xml version="1.0" encoding="utf-8"?>
 <p:properties xmlns:p="http://schemas.microsoft.com/office/2006/metadata/properties" xmlns:xsi="http://www.w3.org/2001/XMLSchema-instance" xmlns:pc="http://schemas.microsoft.com/office/infopath/2007/PartnerControls">
   <documentManagement>
     <TaxCatchAll xmlns="fd664af8-c6d7-4188-9869-6e1869bb0883" xsi:nil="true"/>
@@ -35929,8 +35870,67 @@
 </p:properties>
 </file>
 
+<file path=customXml/item4.xml><?xml version="1.0" encoding="utf-8"?>
+<?mso-contentType ?>
+<FormTemplates xmlns="http://schemas.microsoft.com/sharepoint/v3/contenttype/forms">
+  <Display>DocumentLibraryForm</Display>
+  <Edit>DocumentLibraryForm</Edit>
+  <New>DocumentLibraryForm</New>
+</FormTemplates>
+</file>
+
+<file path=customXml/item5.xml><?xml version="1.0" encoding="utf-8"?>
+<TemplafyFormConfiguration><![CDATA[{"formFields":[{"distinct":false,"hideIfNoUserInteractionRequired":false,"required":true,"autoSelectFirstOption":false,"shareValue":false,"type":"dropDown","dataSourceName":"PPTSubBrandLogos2023","dataSourceFieldName":"Name","name":"SAPLogo","label":"Select Template"},{"distinct":false,"hideIfNoUserInteractionRequired":false,"required":true,"autoSelectFirstOption":false,"shareValue":false,"type":"dropDown","dataSourceName":"Classification","dataSourceFieldName":"Name","name":"Classification","label":"Select Classification"},{"required":false,"shareValue":false,"type":"datePicker","name":"Date","label":"Date"},{"required":false,"placeholder":"","lines":1,"defaultValue":"{{StringJoin(\" \", UserProfile.FirstName,UserProfile.LastName)}}","helpTexts":{"prefix":"After your name, include your preferred pronouns (they/them, she/her, he/him)."},"shareValue":false,"type":"textBox","name":"SpeakerName","label":"Name and Pronouns"},{"required":false,"placeholder":"","lines":1,"defaultValue":"{{UserProfile.Email}}","shareValue":false,"type":"textBox","name":"Email","label":"Email"}],"formDataEntries":[{"name":"SAPLogo","value":"pxB0tb4qiCEYCgGk2fAV86fXsKRk9ZMKiRC3VaLJ5C8="},{"name":"Classification","value":"JhIipzZMLzT12iPN9zD3fohu67W2dokK4YSrgIPhYes="},{"name":"SpeakerName","value":"n/aVkO+bL8Ky5r8yhtIP1kzUEzeDWyZhE8CcUDpY1XQ="}]}]]></TemplafyFormConfiguration>
+</file>
+
 <file path=customXml/item6.xml><?xml version="1.0" encoding="utf-8"?>
-<TemplafyTemplateConfiguration><![CDATA[{"elementsMetadata":[{"type":"shape","id":"d2a5e899-6291-46a7-a989-53cff643de6a","elementConfiguration":{"binding":"{{ DataSources.Classification[Form.Classification.Name].Display}}","type":"text","disableUpdates":false}},{"type":"shape","id":"39417289-d54b-4324-8a8a-2e1f43e092e3","elementConfiguration":{"inheritDimensions":"{{InheritDimensions.InheritNone}}","width":"","height":"1 cm","image":"{{Form.SAPLogo.SubbrandBlue}}","visibility":"","type":"image","disableUpdates":false}},{"type":"shape","id":"1fc1821b-f216-46de-b54d-b736cfccb8cd","elementConfiguration":{"binding":"{{Form.Classification.Display}}","visibility":"","type":"text","disableUpdates":false}},{"type":"shape","id":"be5cec05-5e5b-420e-8e22-74ec879a96f4","elementConfiguration":{"binding":"{{Form.Classification.Display}}","visibility":"","type":"text","disableUpdates":false}},{"type":"shape","id":"b0049908-f0b7-4f69-9e2c-153e0152b501","elementConfiguration":{"inheritDimensions":"{{InheritDimensions.InheritNone}}","width":"","height":"1 cm","image":"{{Form.SAPLogo.SubbrandBlack}}","visibility":"","type":"image","disableUpdates":false}},{"type":"shape","id":"eac1b77e-f4cd-4c4b-a931-e03bac202f34","elementConfiguration":{"inheritDimensions":"{{InheritDimensions.InheritNone}}","width":"","height":"1 cm","image":"{{Form.SAPLogo.SubbrandWhite}}","visibility":"","type":"image","disableUpdates":false}},{"type":"shape","id":"7b47a565-415b-49e0-b138-ab108c2c5bf9","elementConfiguration":{"binding":"{{Form.Classification.Display}}","visibility":"","type":"text","disableUpdates":false}},{"type":"shape","id":"af622395-3cc3-4f57-bfc8-0cade9aeb343","elementConfiguration":{"inheritDimensions":"{{InheritDimensions.InheritNone}}","width":"","height":"1 cm","image":"{{Form.SAPLogo.SubbrandBlue}}","visibility":"","type":"image","disableUpdates":false}},{"type":"shape","id":"7ce31f04-ac1b-43fd-b1bd-03e4f0afe96f","elementConfiguration":{"binding":"{{Form.Classification.Display}}","visibility":"","type":"text","disableUpdates":false}},{"type":"shape","id":"7086da9f-9e03-4afa-ae88-da1106d959de","elementConfiguration":{"inheritDimensions":"{{InheritDimensions.InheritNone}}","width":"","height":"1 cm","image":"{{Form.SAPLogo.SubbrandBlue}}","visibility":"","type":"image","disableUpdates":false}},{"type":"shape","id":"e386a4ac-3173-45e4-9ccc-c2edc57366b1","elementConfiguration":{"binding":"{{Form.Classification.Display}}","visibility":"","type":"text","disableUpdates":false}},{"type":"shape","id":"e05bf989-c620-408c-982d-87c8f6cb3c3b","elementConfiguration":{"inheritDimensions":"{{InheritDimensions.InheritNone}}","width":"","height":"1 cm","image":"{{Form.SAPLogo.SubbrandBlue}}","visibility":"","type":"image","disableUpdates":false}},{"type":"shape","id":"1a0e37ad-b3f5-4493-8bd9-55d0a6497843","elementConfiguration":{"binding":"{{Form.Classification.Display}}","visibility":"","type":"text","disableUpdates":false}},{"type":"shape","id":"e2a3e93d-bd0a-49fa-91c9-a5cc9128d719","elementConfiguration":{"inheritDimensions":"{{InheritDimensions.InheritNone}}","width":"","height":"1 cm","image":"{{Form.SAPLogo.SubbrandWhite}}","visibility":"","type":"image","disableUpdates":false}},{"type":"shape","id":"aa193904-7b1a-41c2-8d48-f016243962b9","elementConfiguration":{"binding":"{{Form.Classification.Display}}","visibility":"","type":"text","disableUpdates":false}},{"type":"shape","id":"250ae429-51a3-4f7b-bb63-8b7d9d4a344f","elementConfiguration":{"binding":"{{DataSources.PPTCopyRight[\"Slide 5 copyright\"].CopyrightMessage}}","visibility":"","type":"text","disableUpdates":false}},{"type":"shape","id":"16bc9ca9-9858-45a5-b567-5d40c89c52d7","elementConfiguration":{"inheritDimensions":"{{InheritDimensions.InheritNone}}","width":"","height":"1 cm","image":"{{Form.SAPLogo.SubbrandBlack}}","visibility":"","type":"image","disableUpdates":false}},{"type":"shape","id":"839b1117-d1c2-46d5-bf6f-0be4823fe17a","elementConfiguration":{"binding":"{{Form.Classification.Display}}","visibility":"","type":"text","disableUpdates":false}},{"type":"shape","id":"95f178e8-912d-43f8-a78d-be2a42579b51","elementConfiguration":{"inheritDimensions":"{{InheritDimensions.InheritNone}}","width":"","height":"1 cm","image":"{{Form.SAPLogo.SubbrandWhite}}","visibility":"","type":"image","disableUpdates":false}},{"type":"shape","id":"522445cc-640a-48ad-baff-184cd00aa3b7","elementConfiguration":{"binding":"{{Form.Classification.Display}}","visibility":"","type":"text","disableUpdates":false}},{"type":"shape","id":"37744108-5a57-4878-9330-85a73170a356","elementConfiguration":{"inheritDimensions":"{{InheritDimensions.InheritNone}}","width":"","height":"1 cm","image":"{{Form.SAPLogo.SubbrandBlack}}","visibility":"","type":"image","disableUpdates":false}},{"type":"shape","id":"259d9c35-7d20-4427-8a64-40a93b11c506","elementConfiguration":{"binding":"{{Form.Classification.Display}}","visibility":"","type":"text","disableUpdates":false}},{"type":"shape","id":"ae0bf8b3-b385-430f-b3eb-acb65628601f","elementConfiguration":{"inheritDimensions":"{{InheritDimensions.InheritNone}}","width":"","height":"1 cm","image":"{{Form.SAPLogo.SubbrandWhite}}","visibility":"","type":"image","disableUpdates":false}},{"type":"shape","id":"cc483056-5139-4a2a-bf58-ab77694c4dca","elementConfiguration":{"binding":"{{Form.Classification.Display}}","visibility":"","type":"text","disableUpdates":false}},{"type":"shape","id":"3df636fb-c7f0-4fd8-9d7d-237adf67a874","elementConfiguration":{"inheritDimensions":"{{InheritDimensions.InheritNone}}","width":"","height":"1 cm","image":"{{Form.SAPLogo.SubbrandWhite}}","visibility":"","type":"image","disableUpdates":false}},{"type":"shape","id":"783f021e-1741-48c6-9e81-865609c9c0a6","elementConfiguration":{"binding":"{{Form.Classification.Display}}","visibility":"","type":"text","disableUpdates":false}},{"type":"shape","id":"314cc4ef-5fc2-470a-804f-636afe5d3346","elementConfiguration":{"binding":"{{StringJoin(\", \", Form.SpeakerName,\"SAP\")}}","type":"text","disableUpdates":false}},{"type":"shape","id":"5a197faf-3070-46ab-b3fb-027c40cfda26","elementConfiguration":{"binding":"{{FormatDateTime(Form.Date,\"MMMM dd, yyyy\",\"en-US\")}}","type":"text","disableUpdates":false}},{"type":"shape","id":"08835032-f3a0-4771-89d8-73177d312b78","elementConfiguration":{"binding":"{{StringJoin(\", \", Form.SpeakerName,\"SAP\")}}","type":"text","disableUpdates":false}},{"type":"shape","id":"4b6ce213-2ac3-49e2-8995-7692d4fd8fb8","elementConfiguration":{"binding":"{{FormatDateTime(Form.Date,\"MMMM dd, yyyy\",\"en-US\")}}","type":"text","disableUpdates":false}},{"type":"shape","id":"793a1971-5ade-4545-a721-da33ba80ad38","elementConfiguration":{"binding":"{{StringJoin(\", \", Form.SpeakerName,\"SAP\")}}","type":"text","disableUpdates":false}},{"type":"shape","id":"3e678ff5-a821-466f-b4b9-61545a83789a","elementConfiguration":{"binding":"{{FormatDateTime(Form.Date,\"MMMM dd, yyyy\",\"en-US\")}}","type":"text","disableUpdates":false}},{"type":"shape","id":"17e360d8-9841-438c-a1f0-789fee28b922","elementConfiguration":{"binding":"{{StringJoin(\", \", Form.SpeakerName,\"SAP\")}}","type":"text","disableUpdates":false}},{"type":"shape","id":"ed2ba5b2-cc69-4190-aee0-67711eb3c836","elementConfiguration":{"binding":"{{FormatDateTime(Form.Date,\"MMMM dd, yyyy\",\"en-US\")}}","type":"text","disableUpdates":false}},{"type":"shape","id":"8985aa0d-05e2-4122-870e-30d69dcbd753","elementConfiguration":{"binding":"{{StringJoin(\", \", Form.SpeakerName,\"SAP\")}}","type":"text","disableUpdates":false}},{"type":"shape","id":"c91ad873-91e9-4878-8cb6-cf5d0e938dee","elementConfiguration":{"binding":"{{FormatDateTime(Form.Date,\"MMMM dd, yyyy\",\"en-US\")}}","type":"text","disableUpdates":false}},{"type":"shape","id":"395826df-573b-481e-b770-0a38f8f2e18f","elementConfiguration":{"binding":"{{StringJoin(\", \", Form.SpeakerName,\"SAP\")}}","type":"text","disableUpdates":false}},{"type":"shape","id":"8d85e5ba-caf4-476b-93af-f8eec1d7b800","elementConfiguration":{"binding":"{{FormatDateTime(Form.Date,\"MMMM dd, yyyy\",\"en-US\")}}","type":"text","disableUpdates":false}},{"type":"shape","id":"7983c9cd-3ba9-46bd-b02b-84e9672cec2c","elementConfiguration":{"binding":"{{Form.SpeakerName}}","type":"text","disableUpdates":false}},{"type":"shape","id":"190287d2-6090-44f9-b8f3-7674b14f811d","elementConfiguration":{"binding":"{{Form.Email}}","type":"text","disableUpdates":false}}],"transformationConfigurations":[],"templateName":"SAP Template NEW","templateDescription":"Font issue resolved","enableDocumentContentUpdater":true,"version":"2.0"}]]></TemplafyTemplateConfiguration>
+<?mso-contentType ?>
+<spe:Receivers xmlns:spe="http://schemas.microsoft.com/sharepoint/events">
+  <Receiver>
+    <Name>Document ID Generator</Name>
+    <Synchronization>Synchronous</Synchronization>
+    <Type>10001</Type>
+    <SequenceNumber>1000</SequenceNumber>
+    <Url/>
+    <Assembly>Microsoft.Office.DocumentManagement, Version=16.0.0.0, Culture=neutral, PublicKeyToken=71e9bce111e9429c</Assembly>
+    <Class>Microsoft.Office.DocumentManagement.Internal.DocIdHandler</Class>
+    <Data/>
+    <Filter/>
+  </Receiver>
+  <Receiver>
+    <Name>Document ID Generator</Name>
+    <Synchronization>Synchronous</Synchronization>
+    <Type>10002</Type>
+    <SequenceNumber>1001</SequenceNumber>
+    <Url/>
+    <Assembly>Microsoft.Office.DocumentManagement, Version=16.0.0.0, Culture=neutral, PublicKeyToken=71e9bce111e9429c</Assembly>
+    <Class>Microsoft.Office.DocumentManagement.Internal.DocIdHandler</Class>
+    <Data/>
+    <Filter/>
+  </Receiver>
+  <Receiver>
+    <Name>Document ID Generator</Name>
+    <Synchronization>Synchronous</Synchronization>
+    <Type>10004</Type>
+    <SequenceNumber>1002</SequenceNumber>
+    <Url/>
+    <Assembly>Microsoft.Office.DocumentManagement, Version=16.0.0.0, Culture=neutral, PublicKeyToken=71e9bce111e9429c</Assembly>
+    <Class>Microsoft.Office.DocumentManagement.Internal.DocIdHandler</Class>
+    <Data/>
+    <Filter/>
+  </Receiver>
+  <Receiver>
+    <Name>Document ID Generator</Name>
+    <Synchronization>Synchronous</Synchronization>
+    <Type>10006</Type>
+    <SequenceNumber>1003</SequenceNumber>
+    <Url/>
+    <Assembly>Microsoft.Office.DocumentManagement, Version=16.0.0.0, Culture=neutral, PublicKeyToken=71e9bce111e9429c</Assembly>
+    <Class>Microsoft.Office.DocumentManagement.Internal.DocIdHandler</Class>
+    <Data/>
+    <Filter/>
+  </Receiver>
+</spe:Receivers>
 </file>
 
 <file path=customXml/itemProps1.xml><?xml version="1.0" encoding="utf-8"?>
@@ -35953,28 +35953,12 @@
 </file>
 
 <file path=customXml/itemProps2.xml><?xml version="1.0" encoding="utf-8"?>
-<ds:datastoreItem xmlns:ds="http://schemas.openxmlformats.org/officeDocument/2006/customXml" ds:itemID="{9F2F98FD-DD41-4C01-8DE0-1BB87FF1B8A4}">
-  <ds:schemaRefs>
-    <ds:schemaRef ds:uri="http://schemas.microsoft.com/sharepoint/events"/>
-  </ds:schemaRefs>
+<ds:datastoreItem xmlns:ds="http://schemas.openxmlformats.org/officeDocument/2006/customXml" ds:itemID="{626BBCBB-1894-4E66-BA48-9E91CE3ACBA0}">
+  <ds:schemaRefs/>
 </ds:datastoreItem>
 </file>
 
 <file path=customXml/itemProps3.xml><?xml version="1.0" encoding="utf-8"?>
-<ds:datastoreItem xmlns:ds="http://schemas.openxmlformats.org/officeDocument/2006/customXml" ds:itemID="{CC49FFC8-2FF3-4057-96F0-3BCD1A4F0351}">
-  <ds:schemaRefs/>
-</ds:datastoreItem>
-</file>
-
-<file path=customXml/itemProps4.xml><?xml version="1.0" encoding="utf-8"?>
-<ds:datastoreItem xmlns:ds="http://schemas.openxmlformats.org/officeDocument/2006/customXml" ds:itemID="{291DCB28-1C52-4C0E-804A-6BD2D3F0FB8D}">
-  <ds:schemaRefs>
-    <ds:schemaRef ds:uri="http://schemas.microsoft.com/sharepoint/v3/contenttype/forms"/>
-  </ds:schemaRefs>
-</ds:datastoreItem>
-</file>
-
-<file path=customXml/itemProps5.xml><?xml version="1.0" encoding="utf-8"?>
 <ds:datastoreItem xmlns:ds="http://schemas.openxmlformats.org/officeDocument/2006/customXml" ds:itemID="{C1422F45-04DB-421D-8796-270006657806}">
   <ds:schemaRefs>
     <ds:schemaRef ds:uri="http://purl.org/dc/terms/"/>
@@ -35991,9 +35975,25 @@
 </ds:datastoreItem>
 </file>
 
+<file path=customXml/itemProps4.xml><?xml version="1.0" encoding="utf-8"?>
+<ds:datastoreItem xmlns:ds="http://schemas.openxmlformats.org/officeDocument/2006/customXml" ds:itemID="{291DCB28-1C52-4C0E-804A-6BD2D3F0FB8D}">
+  <ds:schemaRefs>
+    <ds:schemaRef ds:uri="http://schemas.microsoft.com/sharepoint/v3/contenttype/forms"/>
+  </ds:schemaRefs>
+</ds:datastoreItem>
+</file>
+
+<file path=customXml/itemProps5.xml><?xml version="1.0" encoding="utf-8"?>
+<ds:datastoreItem xmlns:ds="http://schemas.openxmlformats.org/officeDocument/2006/customXml" ds:itemID="{CC49FFC8-2FF3-4057-96F0-3BCD1A4F0351}">
+  <ds:schemaRefs/>
+</ds:datastoreItem>
+</file>
+
 <file path=customXml/itemProps6.xml><?xml version="1.0" encoding="utf-8"?>
-<ds:datastoreItem xmlns:ds="http://schemas.openxmlformats.org/officeDocument/2006/customXml" ds:itemID="{626BBCBB-1894-4E66-BA48-9E91CE3ACBA0}">
-  <ds:schemaRefs/>
+<ds:datastoreItem xmlns:ds="http://schemas.openxmlformats.org/officeDocument/2006/customXml" ds:itemID="{9F2F98FD-DD41-4C01-8DE0-1BB87FF1B8A4}">
+  <ds:schemaRefs>
+    <ds:schemaRef ds:uri="http://schemas.microsoft.com/sharepoint/events"/>
+  </ds:schemaRefs>
 </ds:datastoreItem>
 </file>
 
